--- a/abbildungen/kap2/Ziele_und_Aufgaben_der_Planung.pptx
+++ b/abbildungen/kap2/Ziele_und_Aufgaben_der_Planung.pptx
@@ -4286,180 +4286,6 @@
             </a:solidFill>
             <a:round/>
             <a:tailEnd type="triangle" w="med" len="med"/>
-          </a:ln>
-        </p:spPr>
-        <p:txBody>
-          <a:bodyPr rtlCol="0" anchor="ctr"/>
-          <a:lstStyle/>
-          <a:p>
-            <a:pPr algn="ctr"/>
-          </a:p>
-        </p:txBody>
-      </p:sp>
-      <p:sp>
-        <p:nvSpPr>
-          <p:cNvPr id="26" name="Knoten"/>
-          <p:cNvSpPr/>
-          <p:nvPr/>
-        </p:nvSpPr>
-        <p:spPr>
-          <a:xfrm>
-            <a:off x="1463400" y="1308600"/>
-            <a:ext cx="32400" cy="32400"/>
-          </a:xfrm>
-          <a:prstGeom prst="ellipse">
-            <a:avLst/>
-          </a:prstGeom>
-          <a:solidFill>
-            <a:srgbClr val="3A3F44"/>
-          </a:solidFill>
-          <a:ln>
-            <a:noFill/>
-          </a:ln>
-        </p:spPr>
-        <p:txBody>
-          <a:bodyPr rtlCol="0" anchor="ctr"/>
-          <a:lstStyle/>
-          <a:p>
-            <a:pPr algn="ctr"/>
-          </a:p>
-        </p:txBody>
-      </p:sp>
-      <p:sp>
-        <p:nvSpPr>
-          <p:cNvPr id="27" name="Knoten"/>
-          <p:cNvSpPr/>
-          <p:nvPr/>
-        </p:nvSpPr>
-        <p:spPr>
-          <a:xfrm>
-            <a:off x="1463400" y="1911306"/>
-            <a:ext cx="32400" cy="32400"/>
-          </a:xfrm>
-          <a:prstGeom prst="ellipse">
-            <a:avLst/>
-          </a:prstGeom>
-          <a:solidFill>
-            <a:srgbClr val="3A3F44"/>
-          </a:solidFill>
-          <a:ln>
-            <a:noFill/>
-          </a:ln>
-        </p:spPr>
-        <p:txBody>
-          <a:bodyPr rtlCol="0" anchor="ctr"/>
-          <a:lstStyle/>
-          <a:p>
-            <a:pPr algn="ctr"/>
-          </a:p>
-        </p:txBody>
-      </p:sp>
-      <p:sp>
-        <p:nvSpPr>
-          <p:cNvPr id="28" name="Knoten"/>
-          <p:cNvSpPr/>
-          <p:nvPr/>
-        </p:nvSpPr>
-        <p:spPr>
-          <a:xfrm>
-            <a:off x="2464200" y="1308600"/>
-            <a:ext cx="32400" cy="32400"/>
-          </a:xfrm>
-          <a:prstGeom prst="ellipse">
-            <a:avLst/>
-          </a:prstGeom>
-          <a:solidFill>
-            <a:srgbClr val="3A3F44"/>
-          </a:solidFill>
-          <a:ln>
-            <a:noFill/>
-          </a:ln>
-        </p:spPr>
-        <p:txBody>
-          <a:bodyPr rtlCol="0" anchor="ctr"/>
-          <a:lstStyle/>
-          <a:p>
-            <a:pPr algn="ctr"/>
-          </a:p>
-        </p:txBody>
-      </p:sp>
-      <p:sp>
-        <p:nvSpPr>
-          <p:cNvPr id="29" name="Knoten"/>
-          <p:cNvSpPr/>
-          <p:nvPr/>
-        </p:nvSpPr>
-        <p:spPr>
-          <a:xfrm>
-            <a:off x="2464200" y="1911306"/>
-            <a:ext cx="32400" cy="32400"/>
-          </a:xfrm>
-          <a:prstGeom prst="ellipse">
-            <a:avLst/>
-          </a:prstGeom>
-          <a:solidFill>
-            <a:srgbClr val="3A3F44"/>
-          </a:solidFill>
-          <a:ln>
-            <a:noFill/>
-          </a:ln>
-        </p:spPr>
-        <p:txBody>
-          <a:bodyPr rtlCol="0" anchor="ctr"/>
-          <a:lstStyle/>
-          <a:p>
-            <a:pPr algn="ctr"/>
-          </a:p>
-        </p:txBody>
-      </p:sp>
-      <p:sp>
-        <p:nvSpPr>
-          <p:cNvPr id="30" name="Knoten"/>
-          <p:cNvSpPr/>
-          <p:nvPr/>
-        </p:nvSpPr>
-        <p:spPr>
-          <a:xfrm>
-            <a:off x="1963800" y="1911306"/>
-            <a:ext cx="32400" cy="32400"/>
-          </a:xfrm>
-          <a:prstGeom prst="ellipse">
-            <a:avLst/>
-          </a:prstGeom>
-          <a:solidFill>
-            <a:srgbClr val="3A3F44"/>
-          </a:solidFill>
-          <a:ln>
-            <a:noFill/>
-          </a:ln>
-        </p:spPr>
-        <p:txBody>
-          <a:bodyPr rtlCol="0" anchor="ctr"/>
-          <a:lstStyle/>
-          <a:p>
-            <a:pPr algn="ctr"/>
-          </a:p>
-        </p:txBody>
-      </p:sp>
-      <p:sp>
-        <p:nvSpPr>
-          <p:cNvPr id="31" name="Knoten"/>
-          <p:cNvSpPr/>
-          <p:nvPr/>
-        </p:nvSpPr>
-        <p:spPr>
-          <a:xfrm>
-            <a:off x="1963800" y="1308600"/>
-            <a:ext cx="32400" cy="32400"/>
-          </a:xfrm>
-          <a:prstGeom prst="ellipse">
-            <a:avLst/>
-          </a:prstGeom>
-          <a:solidFill>
-            <a:srgbClr val="3A3F44"/>
-          </a:solidFill>
-          <a:ln>
-            <a:noFill/>
           </a:ln>
         </p:spPr>
         <p:txBody>
